--- a/Calendario2026/presentaciones/19_Modulo_re.pptx
+++ b/Calendario2026/presentaciones/19_Modulo_re.pptx
@@ -53,7 +53,7 @@
     <p:sldId id="282" r:id="rId44"/>
   </p:sldIdLst>
   <p:sldSz cx="9144000" cy="6858000" type="screen4x3"/>
-  <p:notesSz cx="6858000" cy="9144000"/>
+  <p:notesSz cx="7010400" cy="9296400"/>
   <p:defaultTextStyle>
     <a:defPPr>
       <a:defRPr lang="es-MX"/>
@@ -168,60 +168,37 @@
 </p:presentation>
 </file>
 
+<file path=ppt/revisionInfo.xml><?xml version="1.0" encoding="utf-8"?>
+<p1510:revInfo xmlns:a="http://schemas.openxmlformats.org/drawingml/2006/main" xmlns:r="http://schemas.openxmlformats.org/officeDocument/2006/relationships" xmlns:p1510="http://schemas.microsoft.com/office/powerpoint/2015/10/main">
+  <p1510:revLst>
+    <p1510:client id="{D07A9F3C-159F-46D8-BEAA-8B748DC128E7}" v="1" dt="2026-03-05T23:14:10.695"/>
+  </p1510:revLst>
+</p1510:revInfo>
+</file>
+
 <file path=ppt/changesInfos/changesInfo1.xml><?xml version="1.0" encoding="utf-8"?>
 <pc:chgInfo xmlns:a="http://schemas.openxmlformats.org/drawingml/2006/main" xmlns:r="http://schemas.openxmlformats.org/officeDocument/2006/relationships" xmlns:ac="http://schemas.microsoft.com/office/drawing/2013/main/command" xmlns:pc="http://schemas.microsoft.com/office/powerpoint/2013/main/command">
   <pc:docChgLst>
     <pc:chgData name="Lizethe Pérez Fuertes" userId="4ae9ef87-2a7d-42f8-8dfa-0a501a9e2ff4" providerId="ADAL" clId="{FDDD45CB-1330-4033-A842-3D2746AFF7C7}"/>
-    <pc:docChg chg="modSld">
-      <pc:chgData name="Lizethe Pérez Fuertes" userId="4ae9ef87-2a7d-42f8-8dfa-0a501a9e2ff4" providerId="ADAL" clId="{FDDD45CB-1330-4033-A842-3D2746AFF7C7}" dt="2025-09-04T21:41:59.891" v="18" actId="6549"/>
+    <pc:docChg chg="modSld modNotesMaster">
+      <pc:chgData name="Lizethe Pérez Fuertes" userId="4ae9ef87-2a7d-42f8-8dfa-0a501a9e2ff4" providerId="ADAL" clId="{FDDD45CB-1330-4033-A842-3D2746AFF7C7}" dt="2026-03-06T00:00:35.730" v="20" actId="1036"/>
       <pc:docMkLst>
         <pc:docMk/>
       </pc:docMkLst>
       <pc:sldChg chg="modSp mod">
-        <pc:chgData name="Lizethe Pérez Fuertes" userId="4ae9ef87-2a7d-42f8-8dfa-0a501a9e2ff4" providerId="ADAL" clId="{FDDD45CB-1330-4033-A842-3D2746AFF7C7}" dt="2025-09-04T21:41:34.725" v="14" actId="6549"/>
+        <pc:chgData name="Lizethe Pérez Fuertes" userId="4ae9ef87-2a7d-42f8-8dfa-0a501a9e2ff4" providerId="ADAL" clId="{FDDD45CB-1330-4033-A842-3D2746AFF7C7}" dt="2026-03-06T00:00:35.730" v="20" actId="1036"/>
         <pc:sldMkLst>
           <pc:docMk/>
-          <pc:sldMk cId="658639050" sldId="620"/>
+          <pc:sldMk cId="1451682629" sldId="624"/>
         </pc:sldMkLst>
-        <pc:spChg chg="mod">
-          <ac:chgData name="Lizethe Pérez Fuertes" userId="4ae9ef87-2a7d-42f8-8dfa-0a501a9e2ff4" providerId="ADAL" clId="{FDDD45CB-1330-4033-A842-3D2746AFF7C7}" dt="2025-09-04T21:41:34.725" v="14" actId="6549"/>
-          <ac:spMkLst>
+        <pc:picChg chg="mod">
+          <ac:chgData name="Lizethe Pérez Fuertes" userId="4ae9ef87-2a7d-42f8-8dfa-0a501a9e2ff4" providerId="ADAL" clId="{FDDD45CB-1330-4033-A842-3D2746AFF7C7}" dt="2026-03-06T00:00:35.730" v="20" actId="1036"/>
+          <ac:picMkLst>
             <pc:docMk/>
-            <pc:sldMk cId="658639050" sldId="620"/>
-            <ac:spMk id="7" creationId="{0CE5AA9D-354E-4C31-88A9-A48B5A9BA280}"/>
-          </ac:spMkLst>
-        </pc:spChg>
-        <pc:spChg chg="mod">
-          <ac:chgData name="Lizethe Pérez Fuertes" userId="4ae9ef87-2a7d-42f8-8dfa-0a501a9e2ff4" providerId="ADAL" clId="{FDDD45CB-1330-4033-A842-3D2746AFF7C7}" dt="2025-09-04T21:41:09.855" v="4" actId="1076"/>
-          <ac:spMkLst>
-            <pc:docMk/>
-            <pc:sldMk cId="658639050" sldId="620"/>
-            <ac:spMk id="8" creationId="{E64D28A7-B772-479A-8C51-15D9FA37942C}"/>
-          </ac:spMkLst>
-        </pc:spChg>
-      </pc:sldChg>
-      <pc:sldChg chg="modSp mod">
-        <pc:chgData name="Lizethe Pérez Fuertes" userId="4ae9ef87-2a7d-42f8-8dfa-0a501a9e2ff4" providerId="ADAL" clId="{FDDD45CB-1330-4033-A842-3D2746AFF7C7}" dt="2025-09-04T21:41:59.891" v="18" actId="6549"/>
-        <pc:sldMkLst>
-          <pc:docMk/>
-          <pc:sldMk cId="1023280360" sldId="622"/>
-        </pc:sldMkLst>
-        <pc:spChg chg="mod">
-          <ac:chgData name="Lizethe Pérez Fuertes" userId="4ae9ef87-2a7d-42f8-8dfa-0a501a9e2ff4" providerId="ADAL" clId="{FDDD45CB-1330-4033-A842-3D2746AFF7C7}" dt="2025-09-04T21:41:26.135" v="10" actId="20577"/>
-          <ac:spMkLst>
-            <pc:docMk/>
-            <pc:sldMk cId="1023280360" sldId="622"/>
-            <ac:spMk id="7" creationId="{0CE5AA9D-354E-4C31-88A9-A48B5A9BA280}"/>
-          </ac:spMkLst>
-        </pc:spChg>
-        <pc:spChg chg="mod">
-          <ac:chgData name="Lizethe Pérez Fuertes" userId="4ae9ef87-2a7d-42f8-8dfa-0a501a9e2ff4" providerId="ADAL" clId="{FDDD45CB-1330-4033-A842-3D2746AFF7C7}" dt="2025-09-04T21:41:59.891" v="18" actId="6549"/>
-          <ac:spMkLst>
-            <pc:docMk/>
-            <pc:sldMk cId="1023280360" sldId="622"/>
-            <ac:spMk id="9" creationId="{76FC9DB1-1D4E-44EE-8254-09FCD9F2EB65}"/>
-          </ac:spMkLst>
-        </pc:spChg>
+            <pc:sldMk cId="1451682629" sldId="624"/>
+            <ac:picMk id="3" creationId="{DCE94D24-C568-47E6-B6AA-854690DA14B5}"/>
+          </ac:picMkLst>
+        </pc:picChg>
       </pc:sldChg>
     </pc:docChg>
   </pc:docChgLst>
@@ -263,14 +240,14 @@
         <p:spPr>
           <a:xfrm>
             <a:off x="0" y="0"/>
-            <a:ext cx="2971800" cy="457200"/>
+            <a:ext cx="3037840" cy="464820"/>
           </a:xfrm>
           <a:prstGeom prst="rect">
             <a:avLst/>
           </a:prstGeom>
         </p:spPr>
         <p:txBody>
-          <a:bodyPr vert="horz" lIns="91440" tIns="45720" rIns="91440" bIns="45720" rtlCol="0"/>
+          <a:bodyPr vert="horz" lIns="93177" tIns="46589" rIns="93177" bIns="46589" rtlCol="0"/>
           <a:lstStyle>
             <a:lvl1pPr algn="l">
               <a:defRPr sz="1200"/>
@@ -293,15 +270,15 @@
         </p:nvSpPr>
         <p:spPr>
           <a:xfrm>
-            <a:off x="3884613" y="0"/>
-            <a:ext cx="2971800" cy="457200"/>
+            <a:off x="3970938" y="0"/>
+            <a:ext cx="3037840" cy="464820"/>
           </a:xfrm>
           <a:prstGeom prst="rect">
             <a:avLst/>
           </a:prstGeom>
         </p:spPr>
         <p:txBody>
-          <a:bodyPr vert="horz" lIns="91440" tIns="45720" rIns="91440" bIns="45720" rtlCol="0"/>
+          <a:bodyPr vert="horz" lIns="93177" tIns="46589" rIns="93177" bIns="46589" rtlCol="0"/>
           <a:lstStyle>
             <a:lvl1pPr algn="r">
               <a:defRPr sz="1200"/>
@@ -310,7 +287,7 @@
           <a:p>
             <a:fld id="{DDE721D5-655F-45D2-B717-3C4CD78C8568}" type="datetimeFigureOut">
               <a:rPr lang="es-MX" smtClean="0"/>
-              <a:t>04/09/2025</a:t>
+              <a:t>05/03/2026</a:t>
             </a:fld>
             <a:endParaRPr lang="es-MX" dirty="0"/>
           </a:p>
@@ -328,8 +305,8 @@
         </p:nvSpPr>
         <p:spPr>
           <a:xfrm>
-            <a:off x="1143000" y="685800"/>
-            <a:ext cx="4572000" cy="3429000"/>
+            <a:off x="1181100" y="696913"/>
+            <a:ext cx="4648200" cy="3486150"/>
           </a:xfrm>
           <a:prstGeom prst="rect">
             <a:avLst/>
@@ -342,7 +319,7 @@
           </a:ln>
         </p:spPr>
         <p:txBody>
-          <a:bodyPr vert="horz" lIns="91440" tIns="45720" rIns="91440" bIns="45720" rtlCol="0" anchor="ctr"/>
+          <a:bodyPr vert="horz" lIns="93177" tIns="46589" rIns="93177" bIns="46589" rtlCol="0" anchor="ctr"/>
           <a:lstStyle/>
           <a:p>
             <a:endParaRPr lang="es-MX" dirty="0"/>
@@ -361,15 +338,15 @@
         </p:nvSpPr>
         <p:spPr>
           <a:xfrm>
-            <a:off x="685800" y="4343400"/>
-            <a:ext cx="5486400" cy="4114800"/>
+            <a:off x="701040" y="4415790"/>
+            <a:ext cx="5608320" cy="4183380"/>
           </a:xfrm>
           <a:prstGeom prst="rect">
             <a:avLst/>
           </a:prstGeom>
         </p:spPr>
         <p:txBody>
-          <a:bodyPr vert="horz" lIns="91440" tIns="45720" rIns="91440" bIns="45720" rtlCol="0"/>
+          <a:bodyPr vert="horz" lIns="93177" tIns="46589" rIns="93177" bIns="46589" rtlCol="0"/>
           <a:lstStyle/>
           <a:p>
             <a:pPr lvl="0"/>
@@ -421,15 +398,15 @@
         </p:nvSpPr>
         <p:spPr>
           <a:xfrm>
-            <a:off x="0" y="8685213"/>
-            <a:ext cx="2971800" cy="457200"/>
+            <a:off x="0" y="8829967"/>
+            <a:ext cx="3037840" cy="464820"/>
           </a:xfrm>
           <a:prstGeom prst="rect">
             <a:avLst/>
           </a:prstGeom>
         </p:spPr>
         <p:txBody>
-          <a:bodyPr vert="horz" lIns="91440" tIns="45720" rIns="91440" bIns="45720" rtlCol="0" anchor="b"/>
+          <a:bodyPr vert="horz" lIns="93177" tIns="46589" rIns="93177" bIns="46589" rtlCol="0" anchor="b"/>
           <a:lstStyle>
             <a:lvl1pPr algn="l">
               <a:defRPr sz="1200"/>
@@ -452,15 +429,15 @@
         </p:nvSpPr>
         <p:spPr>
           <a:xfrm>
-            <a:off x="3884613" y="8685213"/>
-            <a:ext cx="2971800" cy="457200"/>
+            <a:off x="3970938" y="8829967"/>
+            <a:ext cx="3037840" cy="464820"/>
           </a:xfrm>
           <a:prstGeom prst="rect">
             <a:avLst/>
           </a:prstGeom>
         </p:spPr>
         <p:txBody>
-          <a:bodyPr vert="horz" lIns="91440" tIns="45720" rIns="91440" bIns="45720" rtlCol="0" anchor="b"/>
+          <a:bodyPr vert="horz" lIns="93177" tIns="46589" rIns="93177" bIns="46589" rtlCol="0" anchor="b"/>
           <a:lstStyle>
             <a:lvl1pPr algn="r">
               <a:defRPr sz="1200"/>
@@ -4203,7 +4180,7 @@
           <a:p>
             <a:fld id="{B3F3E716-CACC-4490-AD07-F24B6A68DE47}" type="datetimeFigureOut">
               <a:rPr lang="es-MX" smtClean="0"/>
-              <a:t>04/09/2025</a:t>
+              <a:t>05/03/2026</a:t>
             </a:fld>
             <a:endParaRPr lang="es-MX" dirty="0"/>
           </a:p>
@@ -4373,7 +4350,7 @@
           <a:p>
             <a:fld id="{B3F3E716-CACC-4490-AD07-F24B6A68DE47}" type="datetimeFigureOut">
               <a:rPr lang="es-MX" smtClean="0"/>
-              <a:t>04/09/2025</a:t>
+              <a:t>05/03/2026</a:t>
             </a:fld>
             <a:endParaRPr lang="es-MX" dirty="0"/>
           </a:p>
@@ -4553,7 +4530,7 @@
           <a:p>
             <a:fld id="{B3F3E716-CACC-4490-AD07-F24B6A68DE47}" type="datetimeFigureOut">
               <a:rPr lang="es-MX" smtClean="0"/>
-              <a:t>04/09/2025</a:t>
+              <a:t>05/03/2026</a:t>
             </a:fld>
             <a:endParaRPr lang="es-MX" dirty="0"/>
           </a:p>
@@ -4706,7 +4683,7 @@
           <a:p>
             <a:fld id="{1D8BD707-D9CF-40AE-B4C6-C98DA3205C09}" type="datetimeFigureOut">
               <a:rPr lang="en-US" smtClean="0"/>
-              <a:t>9/4/2025</a:t>
+              <a:t>3/5/2026</a:t>
             </a:fld>
             <a:endParaRPr lang="en-US" dirty="0"/>
           </a:p>
@@ -4866,7 +4843,7 @@
           <a:p>
             <a:fld id="{B3F3E716-CACC-4490-AD07-F24B6A68DE47}" type="datetimeFigureOut">
               <a:rPr lang="es-MX" smtClean="0"/>
-              <a:t>04/09/2025</a:t>
+              <a:t>05/03/2026</a:t>
             </a:fld>
             <a:endParaRPr lang="es-MX" dirty="0"/>
           </a:p>
@@ -5112,7 +5089,7 @@
           <a:p>
             <a:fld id="{B3F3E716-CACC-4490-AD07-F24B6A68DE47}" type="datetimeFigureOut">
               <a:rPr lang="es-MX" smtClean="0"/>
-              <a:t>04/09/2025</a:t>
+              <a:t>05/03/2026</a:t>
             </a:fld>
             <a:endParaRPr lang="es-MX" dirty="0"/>
           </a:p>
@@ -5400,7 +5377,7 @@
           <a:p>
             <a:fld id="{B3F3E716-CACC-4490-AD07-F24B6A68DE47}" type="datetimeFigureOut">
               <a:rPr lang="es-MX" smtClean="0"/>
-              <a:t>04/09/2025</a:t>
+              <a:t>05/03/2026</a:t>
             </a:fld>
             <a:endParaRPr lang="es-MX" dirty="0"/>
           </a:p>
@@ -5822,7 +5799,7 @@
           <a:p>
             <a:fld id="{B3F3E716-CACC-4490-AD07-F24B6A68DE47}" type="datetimeFigureOut">
               <a:rPr lang="es-MX" smtClean="0"/>
-              <a:t>04/09/2025</a:t>
+              <a:t>05/03/2026</a:t>
             </a:fld>
             <a:endParaRPr lang="es-MX" dirty="0"/>
           </a:p>
@@ -5940,7 +5917,7 @@
           <a:p>
             <a:fld id="{B3F3E716-CACC-4490-AD07-F24B6A68DE47}" type="datetimeFigureOut">
               <a:rPr lang="es-MX" smtClean="0"/>
-              <a:t>04/09/2025</a:t>
+              <a:t>05/03/2026</a:t>
             </a:fld>
             <a:endParaRPr lang="es-MX" dirty="0"/>
           </a:p>
@@ -6035,7 +6012,7 @@
           <a:p>
             <a:fld id="{B3F3E716-CACC-4490-AD07-F24B6A68DE47}" type="datetimeFigureOut">
               <a:rPr lang="es-MX" smtClean="0"/>
-              <a:t>04/09/2025</a:t>
+              <a:t>05/03/2026</a:t>
             </a:fld>
             <a:endParaRPr lang="es-MX" dirty="0"/>
           </a:p>
@@ -6312,7 +6289,7 @@
           <a:p>
             <a:fld id="{B3F3E716-CACC-4490-AD07-F24B6A68DE47}" type="datetimeFigureOut">
               <a:rPr lang="es-MX" smtClean="0"/>
-              <a:t>04/09/2025</a:t>
+              <a:t>05/03/2026</a:t>
             </a:fld>
             <a:endParaRPr lang="es-MX" dirty="0"/>
           </a:p>
@@ -6565,7 +6542,7 @@
           <a:p>
             <a:fld id="{B3F3E716-CACC-4490-AD07-F24B6A68DE47}" type="datetimeFigureOut">
               <a:rPr lang="es-MX" smtClean="0"/>
-              <a:t>04/09/2025</a:t>
+              <a:t>05/03/2026</a:t>
             </a:fld>
             <a:endParaRPr lang="es-MX" dirty="0"/>
           </a:p>
@@ -6778,7 +6755,7 @@
           <a:p>
             <a:fld id="{B3F3E716-CACC-4490-AD07-F24B6A68DE47}" type="datetimeFigureOut">
               <a:rPr lang="es-MX" smtClean="0"/>
-              <a:t>04/09/2025</a:t>
+              <a:t>05/03/2026</a:t>
             </a:fld>
             <a:endParaRPr lang="es-MX" dirty="0"/>
           </a:p>
@@ -20177,7 +20154,7 @@
         </p:blipFill>
         <p:spPr>
           <a:xfrm>
-            <a:off x="839889" y="3087339"/>
+            <a:off x="839889" y="3172377"/>
             <a:ext cx="7308304" cy="2200839"/>
           </a:xfrm>
           <a:prstGeom prst="rect">
